--- a/public/fun/pack/pptx/wedding/결혼식_13_식순중심_오월숲길.pptx
+++ b/public/fun/pack/pptx/wedding/결혼식_13_식순중심_오월숲길.pptx
@@ -3347,7 +3347,7 @@
             <a:r>
               <a:rPr sz="3600" b="1" i="0">
                 <a:solidFill>
-                  <a:srgbClr val="143D21"/>
+                  <a:srgbClr val="1D7236"/>
                 </a:solidFill>
               </a:rPr>
               <a:t>저희 결혼합니다</a:t>
@@ -3385,7 +3385,7 @@
             <a:r>
               <a:rPr sz="1700" b="0" i="1">
                 <a:solidFill>
-                  <a:srgbClr val="143D21"/>
+                  <a:srgbClr val="1D7236"/>
                 </a:solidFill>
               </a:rPr>
               <a:t>예식 순서를 미리 알려 드립니다</a:t>
@@ -3460,7 +3460,7 @@
     <p:bg>
       <p:bgPr>
         <a:solidFill>
-          <a:srgbClr val="D0F1DA"/>
+          <a:srgbClr val="D4F7DE"/>
         </a:solidFill>
         <a:effectLst/>
       </p:bgPr>
@@ -3491,7 +3491,7 @@
           </a:solidFill>
           <a:ln w="25400">
             <a:solidFill>
-              <a:srgbClr val="2B8245"/>
+              <a:srgbClr val="43D66F"/>
             </a:solidFill>
             <a:prstDash val="dash"/>
           </a:ln>
@@ -3534,7 +3534,7 @@
             <a:r>
               <a:rPr sz="3000" b="1" i="0">
                 <a:solidFill>
-                  <a:srgbClr val="143D21"/>
+                  <a:srgbClr val="1D7236"/>
                 </a:solidFill>
               </a:rPr>
               <a:t>신랑 · 신부 소개</a:t>
@@ -3557,11 +3557,11 @@
             <a:avLst/>
           </a:prstGeom>
           <a:solidFill>
-            <a:srgbClr val="D0F1DA"/>
+            <a:srgbClr val="D4F7DE"/>
           </a:solidFill>
           <a:ln w="19050">
             <a:solidFill>
-              <a:srgbClr val="2B8245"/>
+              <a:srgbClr val="43D66F"/>
             </a:solidFill>
             <a:prstDash val="dash"/>
           </a:ln>
@@ -3580,7 +3580,7 @@
             <a:r>
               <a:rPr sz="1200" b="0" i="0">
                 <a:solidFill>
-                  <a:srgbClr val="143D21"/>
+                  <a:srgbClr val="1D7236"/>
                 </a:solidFill>
               </a:rPr>
               <a:t>사진</a:t>
@@ -3618,7 +3618,7 @@
             <a:r>
               <a:rPr sz="1600" b="1" i="0">
                 <a:solidFill>
-                  <a:srgbClr val="143D21"/>
+                  <a:srgbClr val="1D7236"/>
                 </a:solidFill>
               </a:rPr>
               <a:t>신랑</a:t>
@@ -3709,11 +3709,11 @@
             <a:avLst/>
           </a:prstGeom>
           <a:solidFill>
-            <a:srgbClr val="D0F1DA"/>
+            <a:srgbClr val="D4F7DE"/>
           </a:solidFill>
           <a:ln w="19050">
             <a:solidFill>
-              <a:srgbClr val="2B8245"/>
+              <a:srgbClr val="43D66F"/>
             </a:solidFill>
             <a:prstDash val="dash"/>
           </a:ln>
@@ -3732,7 +3732,7 @@
             <a:r>
               <a:rPr sz="1200" b="0" i="0">
                 <a:solidFill>
-                  <a:srgbClr val="143D21"/>
+                  <a:srgbClr val="1D7236"/>
                 </a:solidFill>
               </a:rPr>
               <a:t>사진</a:t>
@@ -3770,7 +3770,7 @@
             <a:r>
               <a:rPr sz="1600" b="1" i="0">
                 <a:solidFill>
-                  <a:srgbClr val="143D21"/>
+                  <a:srgbClr val="1D7236"/>
                 </a:solidFill>
               </a:rPr>
               <a:t>신부</a:t>
@@ -3860,7 +3860,7 @@
     <p:bg>
       <p:bgPr>
         <a:solidFill>
-          <a:srgbClr val="D0F1DA"/>
+          <a:srgbClr val="D4F7DE"/>
         </a:solidFill>
         <a:effectLst/>
       </p:bgPr>
@@ -3891,7 +3891,7 @@
           </a:solidFill>
           <a:ln w="25400">
             <a:solidFill>
-              <a:srgbClr val="2B8245"/>
+              <a:srgbClr val="43D66F"/>
             </a:solidFill>
             <a:prstDash val="dash"/>
           </a:ln>
@@ -3934,7 +3934,7 @@
             <a:r>
               <a:rPr sz="3000" b="1" i="0">
                 <a:solidFill>
-                  <a:srgbClr val="143D21"/>
+                  <a:srgbClr val="1D7236"/>
                 </a:solidFill>
               </a:rPr>
               <a:t>식순 안내</a:t>
@@ -3985,30 +3985,30 @@
                   <a:tcPr anchor="ctr" marL="73152" marR="73152">
                     <a:lnL w="9525" cap="flat" cmpd="sng" algn="ctr">
                       <a:solidFill>
-                        <a:srgbClr val="2B8245"/>
+                        <a:srgbClr val="43D66F"/>
                       </a:solidFill>
                       <a:prstDash val="solid"/>
                     </a:lnL>
                     <a:lnR w="9525" cap="flat" cmpd="sng" algn="ctr">
                       <a:solidFill>
-                        <a:srgbClr val="2B8245"/>
+                        <a:srgbClr val="43D66F"/>
                       </a:solidFill>
                       <a:prstDash val="solid"/>
                     </a:lnR>
                     <a:lnT w="9525" cap="flat" cmpd="sng" algn="ctr">
                       <a:solidFill>
-                        <a:srgbClr val="2B8245"/>
+                        <a:srgbClr val="43D66F"/>
                       </a:solidFill>
                       <a:prstDash val="solid"/>
                     </a:lnT>
                     <a:lnB w="9525" cap="flat" cmpd="sng" algn="ctr">
                       <a:solidFill>
-                        <a:srgbClr val="2B8245"/>
+                        <a:srgbClr val="43D66F"/>
                       </a:solidFill>
                       <a:prstDash val="solid"/>
                     </a:lnB>
                     <a:solidFill>
-                      <a:srgbClr val="2B8245"/>
+                      <a:srgbClr val="43D66F"/>
                     </a:solidFill>
                   </a:tcPr>
                 </a:tc>
@@ -4031,30 +4031,30 @@
                   <a:tcPr anchor="ctr" marL="73152" marR="73152">
                     <a:lnL w="9525" cap="flat" cmpd="sng" algn="ctr">
                       <a:solidFill>
-                        <a:srgbClr val="2B8245"/>
+                        <a:srgbClr val="43D66F"/>
                       </a:solidFill>
                       <a:prstDash val="solid"/>
                     </a:lnL>
                     <a:lnR w="9525" cap="flat" cmpd="sng" algn="ctr">
                       <a:solidFill>
-                        <a:srgbClr val="2B8245"/>
+                        <a:srgbClr val="43D66F"/>
                       </a:solidFill>
                       <a:prstDash val="solid"/>
                     </a:lnR>
                     <a:lnT w="9525" cap="flat" cmpd="sng" algn="ctr">
                       <a:solidFill>
-                        <a:srgbClr val="2B8245"/>
+                        <a:srgbClr val="43D66F"/>
                       </a:solidFill>
                       <a:prstDash val="solid"/>
                     </a:lnT>
                     <a:lnB w="9525" cap="flat" cmpd="sng" algn="ctr">
                       <a:solidFill>
-                        <a:srgbClr val="2B8245"/>
+                        <a:srgbClr val="43D66F"/>
                       </a:solidFill>
                       <a:prstDash val="solid"/>
                     </a:lnB>
                     <a:solidFill>
-                      <a:srgbClr val="2B8245"/>
+                      <a:srgbClr val="43D66F"/>
                     </a:solidFill>
                   </a:tcPr>
                 </a:tc>
@@ -4077,30 +4077,30 @@
                   <a:tcPr anchor="ctr" marL="73152" marR="73152">
                     <a:lnL w="9525" cap="flat" cmpd="sng" algn="ctr">
                       <a:solidFill>
-                        <a:srgbClr val="2B8245"/>
+                        <a:srgbClr val="43D66F"/>
                       </a:solidFill>
                       <a:prstDash val="solid"/>
                     </a:lnL>
                     <a:lnR w="9525" cap="flat" cmpd="sng" algn="ctr">
                       <a:solidFill>
-                        <a:srgbClr val="2B8245"/>
+                        <a:srgbClr val="43D66F"/>
                       </a:solidFill>
                       <a:prstDash val="solid"/>
                     </a:lnR>
                     <a:lnT w="9525" cap="flat" cmpd="sng" algn="ctr">
                       <a:solidFill>
-                        <a:srgbClr val="2B8245"/>
+                        <a:srgbClr val="43D66F"/>
                       </a:solidFill>
                       <a:prstDash val="solid"/>
                     </a:lnT>
                     <a:lnB w="9525" cap="flat" cmpd="sng" algn="ctr">
                       <a:solidFill>
-                        <a:srgbClr val="2B8245"/>
+                        <a:srgbClr val="43D66F"/>
                       </a:solidFill>
                       <a:prstDash val="solid"/>
                     </a:lnB>
                     <a:solidFill>
-                      <a:srgbClr val="2B8245"/>
+                      <a:srgbClr val="43D66F"/>
                     </a:solidFill>
                   </a:tcPr>
                 </a:tc>
@@ -4115,7 +4115,7 @@
                       <a:r>
                         <a:rPr sz="1500" b="1">
                           <a:solidFill>
-                            <a:srgbClr val="143D21"/>
+                            <a:srgbClr val="1D7236"/>
                           </a:solidFill>
                         </a:rPr>
                         <a:t>00:00</a:t>
@@ -4125,30 +4125,30 @@
                   <a:tcPr anchor="ctr" marL="73152" marR="73152">
                     <a:lnL w="9525" cap="flat" cmpd="sng" algn="ctr">
                       <a:solidFill>
-                        <a:srgbClr val="D0F1DA"/>
+                        <a:srgbClr val="D4F7DE"/>
                       </a:solidFill>
                       <a:prstDash val="solid"/>
                     </a:lnL>
                     <a:lnR w="9525" cap="flat" cmpd="sng" algn="ctr">
                       <a:solidFill>
-                        <a:srgbClr val="D0F1DA"/>
+                        <a:srgbClr val="D4F7DE"/>
                       </a:solidFill>
                       <a:prstDash val="solid"/>
                     </a:lnR>
                     <a:lnT w="9525" cap="flat" cmpd="sng" algn="ctr">
                       <a:solidFill>
-                        <a:srgbClr val="D0F1DA"/>
+                        <a:srgbClr val="D4F7DE"/>
                       </a:solidFill>
                       <a:prstDash val="solid"/>
                     </a:lnT>
                     <a:lnB w="9525" cap="flat" cmpd="sng" algn="ctr">
                       <a:solidFill>
-                        <a:srgbClr val="D0F1DA"/>
+                        <a:srgbClr val="D4F7DE"/>
                       </a:solidFill>
                       <a:prstDash val="solid"/>
                     </a:lnB>
                     <a:solidFill>
-                      <a:srgbClr val="D0F1DA"/>
+                      <a:srgbClr val="D4F7DE"/>
                     </a:solidFill>
                   </a:tcPr>
                 </a:tc>
@@ -4171,25 +4171,25 @@
                   <a:tcPr anchor="ctr" marL="73152" marR="73152">
                     <a:lnL w="9525" cap="flat" cmpd="sng" algn="ctr">
                       <a:solidFill>
-                        <a:srgbClr val="D0F1DA"/>
+                        <a:srgbClr val="D4F7DE"/>
                       </a:solidFill>
                       <a:prstDash val="solid"/>
                     </a:lnL>
                     <a:lnR w="9525" cap="flat" cmpd="sng" algn="ctr">
                       <a:solidFill>
-                        <a:srgbClr val="D0F1DA"/>
+                        <a:srgbClr val="D4F7DE"/>
                       </a:solidFill>
                       <a:prstDash val="solid"/>
                     </a:lnR>
                     <a:lnT w="9525" cap="flat" cmpd="sng" algn="ctr">
                       <a:solidFill>
-                        <a:srgbClr val="D0F1DA"/>
+                        <a:srgbClr val="D4F7DE"/>
                       </a:solidFill>
                       <a:prstDash val="solid"/>
                     </a:lnT>
                     <a:lnB w="9525" cap="flat" cmpd="sng" algn="ctr">
                       <a:solidFill>
-                        <a:srgbClr val="D0F1DA"/>
+                        <a:srgbClr val="D4F7DE"/>
                       </a:solidFill>
                       <a:prstDash val="solid"/>
                     </a:lnB>
@@ -4217,25 +4217,25 @@
                   <a:tcPr anchor="ctr" marL="73152" marR="73152">
                     <a:lnL w="9525" cap="flat" cmpd="sng" algn="ctr">
                       <a:solidFill>
-                        <a:srgbClr val="D0F1DA"/>
+                        <a:srgbClr val="D4F7DE"/>
                       </a:solidFill>
                       <a:prstDash val="solid"/>
                     </a:lnL>
                     <a:lnR w="9525" cap="flat" cmpd="sng" algn="ctr">
                       <a:solidFill>
-                        <a:srgbClr val="D0F1DA"/>
+                        <a:srgbClr val="D4F7DE"/>
                       </a:solidFill>
                       <a:prstDash val="solid"/>
                     </a:lnR>
                     <a:lnT w="9525" cap="flat" cmpd="sng" algn="ctr">
                       <a:solidFill>
-                        <a:srgbClr val="D0F1DA"/>
+                        <a:srgbClr val="D4F7DE"/>
                       </a:solidFill>
                       <a:prstDash val="solid"/>
                     </a:lnT>
                     <a:lnB w="9525" cap="flat" cmpd="sng" algn="ctr">
                       <a:solidFill>
-                        <a:srgbClr val="D0F1DA"/>
+                        <a:srgbClr val="D4F7DE"/>
                       </a:solidFill>
                       <a:prstDash val="solid"/>
                     </a:lnB>
@@ -4255,7 +4255,7 @@
                       <a:r>
                         <a:rPr sz="1500" b="1">
                           <a:solidFill>
-                            <a:srgbClr val="143D21"/>
+                            <a:srgbClr val="1D7236"/>
                           </a:solidFill>
                         </a:rPr>
                         <a:t>00:00</a:t>
@@ -4265,30 +4265,30 @@
                   <a:tcPr anchor="ctr" marL="73152" marR="73152">
                     <a:lnL w="9525" cap="flat" cmpd="sng" algn="ctr">
                       <a:solidFill>
-                        <a:srgbClr val="D0F1DA"/>
+                        <a:srgbClr val="D4F7DE"/>
                       </a:solidFill>
                       <a:prstDash val="solid"/>
                     </a:lnL>
                     <a:lnR w="9525" cap="flat" cmpd="sng" algn="ctr">
                       <a:solidFill>
-                        <a:srgbClr val="D0F1DA"/>
+                        <a:srgbClr val="D4F7DE"/>
                       </a:solidFill>
                       <a:prstDash val="solid"/>
                     </a:lnR>
                     <a:lnT w="9525" cap="flat" cmpd="sng" algn="ctr">
                       <a:solidFill>
-                        <a:srgbClr val="D0F1DA"/>
+                        <a:srgbClr val="D4F7DE"/>
                       </a:solidFill>
                       <a:prstDash val="solid"/>
                     </a:lnT>
                     <a:lnB w="9525" cap="flat" cmpd="sng" algn="ctr">
                       <a:solidFill>
-                        <a:srgbClr val="D0F1DA"/>
+                        <a:srgbClr val="D4F7DE"/>
                       </a:solidFill>
                       <a:prstDash val="solid"/>
                     </a:lnB>
                     <a:solidFill>
-                      <a:srgbClr val="D0F1DA"/>
+                      <a:srgbClr val="D4F7DE"/>
                     </a:solidFill>
                   </a:tcPr>
                 </a:tc>
@@ -4311,30 +4311,30 @@
                   <a:tcPr anchor="ctr" marL="73152" marR="73152">
                     <a:lnL w="9525" cap="flat" cmpd="sng" algn="ctr">
                       <a:solidFill>
-                        <a:srgbClr val="D0F1DA"/>
+                        <a:srgbClr val="D4F7DE"/>
                       </a:solidFill>
                       <a:prstDash val="solid"/>
                     </a:lnL>
                     <a:lnR w="9525" cap="flat" cmpd="sng" algn="ctr">
                       <a:solidFill>
-                        <a:srgbClr val="D0F1DA"/>
+                        <a:srgbClr val="D4F7DE"/>
                       </a:solidFill>
                       <a:prstDash val="solid"/>
                     </a:lnR>
                     <a:lnT w="9525" cap="flat" cmpd="sng" algn="ctr">
                       <a:solidFill>
-                        <a:srgbClr val="D0F1DA"/>
+                        <a:srgbClr val="D4F7DE"/>
                       </a:solidFill>
                       <a:prstDash val="solid"/>
                     </a:lnT>
                     <a:lnB w="9525" cap="flat" cmpd="sng" algn="ctr">
                       <a:solidFill>
-                        <a:srgbClr val="D0F1DA"/>
+                        <a:srgbClr val="D4F7DE"/>
                       </a:solidFill>
                       <a:prstDash val="solid"/>
                     </a:lnB>
                     <a:solidFill>
-                      <a:srgbClr val="F0FAF3"/>
+                      <a:srgbClr val="F3FCF6"/>
                     </a:solidFill>
                   </a:tcPr>
                 </a:tc>
@@ -4357,30 +4357,30 @@
                   <a:tcPr anchor="ctr" marL="73152" marR="73152">
                     <a:lnL w="9525" cap="flat" cmpd="sng" algn="ctr">
                       <a:solidFill>
-                        <a:srgbClr val="D0F1DA"/>
+                        <a:srgbClr val="D4F7DE"/>
                       </a:solidFill>
                       <a:prstDash val="solid"/>
                     </a:lnL>
                     <a:lnR w="9525" cap="flat" cmpd="sng" algn="ctr">
                       <a:solidFill>
-                        <a:srgbClr val="D0F1DA"/>
+                        <a:srgbClr val="D4F7DE"/>
                       </a:solidFill>
                       <a:prstDash val="solid"/>
                     </a:lnR>
                     <a:lnT w="9525" cap="flat" cmpd="sng" algn="ctr">
                       <a:solidFill>
-                        <a:srgbClr val="D0F1DA"/>
+                        <a:srgbClr val="D4F7DE"/>
                       </a:solidFill>
                       <a:prstDash val="solid"/>
                     </a:lnT>
                     <a:lnB w="9525" cap="flat" cmpd="sng" algn="ctr">
                       <a:solidFill>
-                        <a:srgbClr val="D0F1DA"/>
+                        <a:srgbClr val="D4F7DE"/>
                       </a:solidFill>
                       <a:prstDash val="solid"/>
                     </a:lnB>
                     <a:solidFill>
-                      <a:srgbClr val="F0FAF3"/>
+                      <a:srgbClr val="F3FCF6"/>
                     </a:solidFill>
                   </a:tcPr>
                 </a:tc>
@@ -4395,7 +4395,7 @@
                       <a:r>
                         <a:rPr sz="1500" b="1">
                           <a:solidFill>
-                            <a:srgbClr val="143D21"/>
+                            <a:srgbClr val="1D7236"/>
                           </a:solidFill>
                         </a:rPr>
                         <a:t>00:00</a:t>
@@ -4405,30 +4405,30 @@
                   <a:tcPr anchor="ctr" marL="73152" marR="73152">
                     <a:lnL w="9525" cap="flat" cmpd="sng" algn="ctr">
                       <a:solidFill>
-                        <a:srgbClr val="D0F1DA"/>
+                        <a:srgbClr val="D4F7DE"/>
                       </a:solidFill>
                       <a:prstDash val="solid"/>
                     </a:lnL>
                     <a:lnR w="9525" cap="flat" cmpd="sng" algn="ctr">
                       <a:solidFill>
-                        <a:srgbClr val="D0F1DA"/>
+                        <a:srgbClr val="D4F7DE"/>
                       </a:solidFill>
                       <a:prstDash val="solid"/>
                     </a:lnR>
                     <a:lnT w="9525" cap="flat" cmpd="sng" algn="ctr">
                       <a:solidFill>
-                        <a:srgbClr val="D0F1DA"/>
+                        <a:srgbClr val="D4F7DE"/>
                       </a:solidFill>
                       <a:prstDash val="solid"/>
                     </a:lnT>
                     <a:lnB w="9525" cap="flat" cmpd="sng" algn="ctr">
                       <a:solidFill>
-                        <a:srgbClr val="D0F1DA"/>
+                        <a:srgbClr val="D4F7DE"/>
                       </a:solidFill>
                       <a:prstDash val="solid"/>
                     </a:lnB>
                     <a:solidFill>
-                      <a:srgbClr val="D0F1DA"/>
+                      <a:srgbClr val="D4F7DE"/>
                     </a:solidFill>
                   </a:tcPr>
                 </a:tc>
@@ -4451,25 +4451,25 @@
                   <a:tcPr anchor="ctr" marL="73152" marR="73152">
                     <a:lnL w="9525" cap="flat" cmpd="sng" algn="ctr">
                       <a:solidFill>
-                        <a:srgbClr val="D0F1DA"/>
+                        <a:srgbClr val="D4F7DE"/>
                       </a:solidFill>
                       <a:prstDash val="solid"/>
                     </a:lnL>
                     <a:lnR w="9525" cap="flat" cmpd="sng" algn="ctr">
                       <a:solidFill>
-                        <a:srgbClr val="D0F1DA"/>
+                        <a:srgbClr val="D4F7DE"/>
                       </a:solidFill>
                       <a:prstDash val="solid"/>
                     </a:lnR>
                     <a:lnT w="9525" cap="flat" cmpd="sng" algn="ctr">
                       <a:solidFill>
-                        <a:srgbClr val="D0F1DA"/>
+                        <a:srgbClr val="D4F7DE"/>
                       </a:solidFill>
                       <a:prstDash val="solid"/>
                     </a:lnT>
                     <a:lnB w="9525" cap="flat" cmpd="sng" algn="ctr">
                       <a:solidFill>
-                        <a:srgbClr val="D0F1DA"/>
+                        <a:srgbClr val="D4F7DE"/>
                       </a:solidFill>
                       <a:prstDash val="solid"/>
                     </a:lnB>
@@ -4497,25 +4497,25 @@
                   <a:tcPr anchor="ctr" marL="73152" marR="73152">
                     <a:lnL w="9525" cap="flat" cmpd="sng" algn="ctr">
                       <a:solidFill>
-                        <a:srgbClr val="D0F1DA"/>
+                        <a:srgbClr val="D4F7DE"/>
                       </a:solidFill>
                       <a:prstDash val="solid"/>
                     </a:lnL>
                     <a:lnR w="9525" cap="flat" cmpd="sng" algn="ctr">
                       <a:solidFill>
-                        <a:srgbClr val="D0F1DA"/>
+                        <a:srgbClr val="D4F7DE"/>
                       </a:solidFill>
                       <a:prstDash val="solid"/>
                     </a:lnR>
                     <a:lnT w="9525" cap="flat" cmpd="sng" algn="ctr">
                       <a:solidFill>
-                        <a:srgbClr val="D0F1DA"/>
+                        <a:srgbClr val="D4F7DE"/>
                       </a:solidFill>
                       <a:prstDash val="solid"/>
                     </a:lnT>
                     <a:lnB w="9525" cap="flat" cmpd="sng" algn="ctr">
                       <a:solidFill>
-                        <a:srgbClr val="D0F1DA"/>
+                        <a:srgbClr val="D4F7DE"/>
                       </a:solidFill>
                       <a:prstDash val="solid"/>
                     </a:lnB>
@@ -4535,7 +4535,7 @@
                       <a:r>
                         <a:rPr sz="1500" b="1">
                           <a:solidFill>
-                            <a:srgbClr val="143D21"/>
+                            <a:srgbClr val="1D7236"/>
                           </a:solidFill>
                         </a:rPr>
                         <a:t>00:00</a:t>
@@ -4545,30 +4545,30 @@
                   <a:tcPr anchor="ctr" marL="73152" marR="73152">
                     <a:lnL w="9525" cap="flat" cmpd="sng" algn="ctr">
                       <a:solidFill>
-                        <a:srgbClr val="D0F1DA"/>
+                        <a:srgbClr val="D4F7DE"/>
                       </a:solidFill>
                       <a:prstDash val="solid"/>
                     </a:lnL>
                     <a:lnR w="9525" cap="flat" cmpd="sng" algn="ctr">
                       <a:solidFill>
-                        <a:srgbClr val="D0F1DA"/>
+                        <a:srgbClr val="D4F7DE"/>
                       </a:solidFill>
                       <a:prstDash val="solid"/>
                     </a:lnR>
                     <a:lnT w="9525" cap="flat" cmpd="sng" algn="ctr">
                       <a:solidFill>
-                        <a:srgbClr val="D0F1DA"/>
+                        <a:srgbClr val="D4F7DE"/>
                       </a:solidFill>
                       <a:prstDash val="solid"/>
                     </a:lnT>
                     <a:lnB w="9525" cap="flat" cmpd="sng" algn="ctr">
                       <a:solidFill>
-                        <a:srgbClr val="D0F1DA"/>
+                        <a:srgbClr val="D4F7DE"/>
                       </a:solidFill>
                       <a:prstDash val="solid"/>
                     </a:lnB>
                     <a:solidFill>
-                      <a:srgbClr val="D0F1DA"/>
+                      <a:srgbClr val="D4F7DE"/>
                     </a:solidFill>
                   </a:tcPr>
                 </a:tc>
@@ -4591,30 +4591,30 @@
                   <a:tcPr anchor="ctr" marL="73152" marR="73152">
                     <a:lnL w="9525" cap="flat" cmpd="sng" algn="ctr">
                       <a:solidFill>
-                        <a:srgbClr val="D0F1DA"/>
+                        <a:srgbClr val="D4F7DE"/>
                       </a:solidFill>
                       <a:prstDash val="solid"/>
                     </a:lnL>
                     <a:lnR w="9525" cap="flat" cmpd="sng" algn="ctr">
                       <a:solidFill>
-                        <a:srgbClr val="D0F1DA"/>
+                        <a:srgbClr val="D4F7DE"/>
                       </a:solidFill>
                       <a:prstDash val="solid"/>
                     </a:lnR>
                     <a:lnT w="9525" cap="flat" cmpd="sng" algn="ctr">
                       <a:solidFill>
-                        <a:srgbClr val="D0F1DA"/>
+                        <a:srgbClr val="D4F7DE"/>
                       </a:solidFill>
                       <a:prstDash val="solid"/>
                     </a:lnT>
                     <a:lnB w="9525" cap="flat" cmpd="sng" algn="ctr">
                       <a:solidFill>
-                        <a:srgbClr val="D0F1DA"/>
+                        <a:srgbClr val="D4F7DE"/>
                       </a:solidFill>
                       <a:prstDash val="solid"/>
                     </a:lnB>
                     <a:solidFill>
-                      <a:srgbClr val="F0FAF3"/>
+                      <a:srgbClr val="F3FCF6"/>
                     </a:solidFill>
                   </a:tcPr>
                 </a:tc>
@@ -4637,30 +4637,30 @@
                   <a:tcPr anchor="ctr" marL="73152" marR="73152">
                     <a:lnL w="9525" cap="flat" cmpd="sng" algn="ctr">
                       <a:solidFill>
-                        <a:srgbClr val="D0F1DA"/>
+                        <a:srgbClr val="D4F7DE"/>
                       </a:solidFill>
                       <a:prstDash val="solid"/>
                     </a:lnL>
                     <a:lnR w="9525" cap="flat" cmpd="sng" algn="ctr">
                       <a:solidFill>
-                        <a:srgbClr val="D0F1DA"/>
+                        <a:srgbClr val="D4F7DE"/>
                       </a:solidFill>
                       <a:prstDash val="solid"/>
                     </a:lnR>
                     <a:lnT w="9525" cap="flat" cmpd="sng" algn="ctr">
                       <a:solidFill>
-                        <a:srgbClr val="D0F1DA"/>
+                        <a:srgbClr val="D4F7DE"/>
                       </a:solidFill>
                       <a:prstDash val="solid"/>
                     </a:lnT>
                     <a:lnB w="9525" cap="flat" cmpd="sng" algn="ctr">
                       <a:solidFill>
-                        <a:srgbClr val="D0F1DA"/>
+                        <a:srgbClr val="D4F7DE"/>
                       </a:solidFill>
                       <a:prstDash val="solid"/>
                     </a:lnB>
                     <a:solidFill>
-                      <a:srgbClr val="F0FAF3"/>
+                      <a:srgbClr val="F3FCF6"/>
                     </a:solidFill>
                   </a:tcPr>
                 </a:tc>
@@ -4675,7 +4675,7 @@
                       <a:r>
                         <a:rPr sz="1500" b="1">
                           <a:solidFill>
-                            <a:srgbClr val="143D21"/>
+                            <a:srgbClr val="1D7236"/>
                           </a:solidFill>
                         </a:rPr>
                         <a:t>00:00</a:t>
@@ -4685,30 +4685,30 @@
                   <a:tcPr anchor="ctr" marL="73152" marR="73152">
                     <a:lnL w="9525" cap="flat" cmpd="sng" algn="ctr">
                       <a:solidFill>
-                        <a:srgbClr val="D0F1DA"/>
+                        <a:srgbClr val="D4F7DE"/>
                       </a:solidFill>
                       <a:prstDash val="solid"/>
                     </a:lnL>
                     <a:lnR w="9525" cap="flat" cmpd="sng" algn="ctr">
                       <a:solidFill>
-                        <a:srgbClr val="D0F1DA"/>
+                        <a:srgbClr val="D4F7DE"/>
                       </a:solidFill>
                       <a:prstDash val="solid"/>
                     </a:lnR>
                     <a:lnT w="9525" cap="flat" cmpd="sng" algn="ctr">
                       <a:solidFill>
-                        <a:srgbClr val="D0F1DA"/>
+                        <a:srgbClr val="D4F7DE"/>
                       </a:solidFill>
                       <a:prstDash val="solid"/>
                     </a:lnT>
                     <a:lnB w="9525" cap="flat" cmpd="sng" algn="ctr">
                       <a:solidFill>
-                        <a:srgbClr val="D0F1DA"/>
+                        <a:srgbClr val="D4F7DE"/>
                       </a:solidFill>
                       <a:prstDash val="solid"/>
                     </a:lnB>
                     <a:solidFill>
-                      <a:srgbClr val="D0F1DA"/>
+                      <a:srgbClr val="D4F7DE"/>
                     </a:solidFill>
                   </a:tcPr>
                 </a:tc>
@@ -4731,25 +4731,25 @@
                   <a:tcPr anchor="ctr" marL="73152" marR="73152">
                     <a:lnL w="9525" cap="flat" cmpd="sng" algn="ctr">
                       <a:solidFill>
-                        <a:srgbClr val="D0F1DA"/>
+                        <a:srgbClr val="D4F7DE"/>
                       </a:solidFill>
                       <a:prstDash val="solid"/>
                     </a:lnL>
                     <a:lnR w="9525" cap="flat" cmpd="sng" algn="ctr">
                       <a:solidFill>
-                        <a:srgbClr val="D0F1DA"/>
+                        <a:srgbClr val="D4F7DE"/>
                       </a:solidFill>
                       <a:prstDash val="solid"/>
                     </a:lnR>
                     <a:lnT w="9525" cap="flat" cmpd="sng" algn="ctr">
                       <a:solidFill>
-                        <a:srgbClr val="D0F1DA"/>
+                        <a:srgbClr val="D4F7DE"/>
                       </a:solidFill>
                       <a:prstDash val="solid"/>
                     </a:lnT>
                     <a:lnB w="9525" cap="flat" cmpd="sng" algn="ctr">
                       <a:solidFill>
-                        <a:srgbClr val="D0F1DA"/>
+                        <a:srgbClr val="D4F7DE"/>
                       </a:solidFill>
                       <a:prstDash val="solid"/>
                     </a:lnB>
@@ -4777,25 +4777,25 @@
                   <a:tcPr anchor="ctr" marL="73152" marR="73152">
                     <a:lnL w="9525" cap="flat" cmpd="sng" algn="ctr">
                       <a:solidFill>
-                        <a:srgbClr val="D0F1DA"/>
+                        <a:srgbClr val="D4F7DE"/>
                       </a:solidFill>
                       <a:prstDash val="solid"/>
                     </a:lnL>
                     <a:lnR w="9525" cap="flat" cmpd="sng" algn="ctr">
                       <a:solidFill>
-                        <a:srgbClr val="D0F1DA"/>
+                        <a:srgbClr val="D4F7DE"/>
                       </a:solidFill>
                       <a:prstDash val="solid"/>
                     </a:lnR>
                     <a:lnT w="9525" cap="flat" cmpd="sng" algn="ctr">
                       <a:solidFill>
-                        <a:srgbClr val="D0F1DA"/>
+                        <a:srgbClr val="D4F7DE"/>
                       </a:solidFill>
                       <a:prstDash val="solid"/>
                     </a:lnT>
                     <a:lnB w="9525" cap="flat" cmpd="sng" algn="ctr">
                       <a:solidFill>
-                        <a:srgbClr val="D0F1DA"/>
+                        <a:srgbClr val="D4F7DE"/>
                       </a:solidFill>
                       <a:prstDash val="solid"/>
                     </a:lnB>
@@ -4823,7 +4823,7 @@
     <p:bg>
       <p:bgPr>
         <a:solidFill>
-          <a:srgbClr val="D0F1DA"/>
+          <a:srgbClr val="D4F7DE"/>
         </a:solidFill>
         <a:effectLst/>
       </p:bgPr>
@@ -4854,7 +4854,7 @@
           </a:solidFill>
           <a:ln w="25400">
             <a:solidFill>
-              <a:srgbClr val="2B8245"/>
+              <a:srgbClr val="43D66F"/>
             </a:solidFill>
             <a:prstDash val="dash"/>
           </a:ln>
@@ -4897,7 +4897,7 @@
             <a:r>
               <a:rPr sz="3000" b="1" i="0">
                 <a:solidFill>
-                  <a:srgbClr val="143D21"/>
+                  <a:srgbClr val="1D7236"/>
                 </a:solidFill>
               </a:rPr>
               <a:t>하객 안내</a:t>
@@ -4922,11 +4922,11 @@
             </a:avLst>
           </a:prstGeom>
           <a:solidFill>
-            <a:srgbClr val="F0FAF3"/>
+            <a:srgbClr val="F3FCF6"/>
           </a:solidFill>
           <a:ln w="15875">
             <a:solidFill>
-              <a:srgbClr val="D0F1DA"/>
+              <a:srgbClr val="D4F7DE"/>
             </a:solidFill>
           </a:ln>
         </p:spPr>
@@ -4953,7 +4953,7 @@
             <a:avLst/>
           </a:prstGeom>
           <a:solidFill>
-            <a:srgbClr val="2B8245"/>
+            <a:srgbClr val="43D66F"/>
           </a:solidFill>
           <a:ln>
             <a:noFill/>
@@ -5011,7 +5011,7 @@
             <a:r>
               <a:rPr sz="1800" b="1" i="0">
                 <a:solidFill>
-                  <a:srgbClr val="143D21"/>
+                  <a:srgbClr val="1D7236"/>
                 </a:solidFill>
               </a:rPr>
               <a:t>주차 안내</a:t>
@@ -5074,11 +5074,11 @@
             </a:avLst>
           </a:prstGeom>
           <a:solidFill>
-            <a:srgbClr val="F0FAF3"/>
+            <a:srgbClr val="F3FCF6"/>
           </a:solidFill>
           <a:ln w="15875">
             <a:solidFill>
-              <a:srgbClr val="D0F1DA"/>
+              <a:srgbClr val="D4F7DE"/>
             </a:solidFill>
           </a:ln>
         </p:spPr>
@@ -5105,7 +5105,7 @@
             <a:avLst/>
           </a:prstGeom>
           <a:solidFill>
-            <a:srgbClr val="2B8245"/>
+            <a:srgbClr val="43D66F"/>
           </a:solidFill>
           <a:ln>
             <a:noFill/>
@@ -5163,7 +5163,7 @@
             <a:r>
               <a:rPr sz="1800" b="1" i="0">
                 <a:solidFill>
-                  <a:srgbClr val="143D21"/>
+                  <a:srgbClr val="1D7236"/>
                 </a:solidFill>
               </a:rPr>
               <a:t>식사 안내</a:t>
@@ -5226,11 +5226,11 @@
             </a:avLst>
           </a:prstGeom>
           <a:solidFill>
-            <a:srgbClr val="F0FAF3"/>
+            <a:srgbClr val="F3FCF6"/>
           </a:solidFill>
           <a:ln w="15875">
             <a:solidFill>
-              <a:srgbClr val="D0F1DA"/>
+              <a:srgbClr val="D4F7DE"/>
             </a:solidFill>
           </a:ln>
         </p:spPr>
@@ -5257,7 +5257,7 @@
             <a:avLst/>
           </a:prstGeom>
           <a:solidFill>
-            <a:srgbClr val="2B8245"/>
+            <a:srgbClr val="43D66F"/>
           </a:solidFill>
           <a:ln>
             <a:noFill/>
@@ -5315,7 +5315,7 @@
             <a:r>
               <a:rPr sz="1800" b="1" i="0">
                 <a:solidFill>
-                  <a:srgbClr val="143D21"/>
+                  <a:srgbClr val="1D7236"/>
                 </a:solidFill>
               </a:rPr>
               <a:t>기념 촬영</a:t>
@@ -5375,7 +5375,7 @@
     <p:bg>
       <p:bgPr>
         <a:solidFill>
-          <a:srgbClr val="D0F1DA"/>
+          <a:srgbClr val="D4F7DE"/>
         </a:solidFill>
         <a:effectLst/>
       </p:bgPr>
@@ -5406,7 +5406,7 @@
           </a:solidFill>
           <a:ln w="25400">
             <a:solidFill>
-              <a:srgbClr val="2B8245"/>
+              <a:srgbClr val="43D66F"/>
             </a:solidFill>
             <a:prstDash val="dash"/>
           </a:ln>
@@ -5449,7 +5449,7 @@
             <a:r>
               <a:rPr sz="3000" b="1" i="0">
                 <a:solidFill>
-                  <a:srgbClr val="143D21"/>
+                  <a:srgbClr val="1D7236"/>
                 </a:solidFill>
               </a:rPr>
               <a:t>웨딩 사진</a:t>
@@ -5474,11 +5474,11 @@
             </a:avLst>
           </a:prstGeom>
           <a:solidFill>
-            <a:srgbClr val="D0F1DA"/>
+            <a:srgbClr val="D4F7DE"/>
           </a:solidFill>
           <a:ln w="19050">
             <a:solidFill>
-              <a:srgbClr val="2B8245"/>
+              <a:srgbClr val="43D66F"/>
             </a:solidFill>
             <a:prstDash val="dash"/>
           </a:ln>
@@ -5497,7 +5497,7 @@
             <a:r>
               <a:rPr sz="1200" b="0" i="0">
                 <a:solidFill>
-                  <a:srgbClr val="143D21"/>
+                  <a:srgbClr val="1D7236"/>
                 </a:solidFill>
               </a:rPr>
               <a:t>사진 1</a:t>
@@ -5522,11 +5522,11 @@
             </a:avLst>
           </a:prstGeom>
           <a:solidFill>
-            <a:srgbClr val="D0F1DA"/>
+            <a:srgbClr val="D4F7DE"/>
           </a:solidFill>
           <a:ln w="19050">
             <a:solidFill>
-              <a:srgbClr val="2B8245"/>
+              <a:srgbClr val="43D66F"/>
             </a:solidFill>
             <a:prstDash val="dash"/>
           </a:ln>
@@ -5545,7 +5545,7 @@
             <a:r>
               <a:rPr sz="1200" b="0" i="0">
                 <a:solidFill>
-                  <a:srgbClr val="143D21"/>
+                  <a:srgbClr val="1D7236"/>
                 </a:solidFill>
               </a:rPr>
               <a:t>사진 2</a:t>
@@ -5570,11 +5570,11 @@
             </a:avLst>
           </a:prstGeom>
           <a:solidFill>
-            <a:srgbClr val="D0F1DA"/>
+            <a:srgbClr val="D4F7DE"/>
           </a:solidFill>
           <a:ln w="19050">
             <a:solidFill>
-              <a:srgbClr val="2B8245"/>
+              <a:srgbClr val="43D66F"/>
             </a:solidFill>
             <a:prstDash val="dash"/>
           </a:ln>
@@ -5593,7 +5593,7 @@
             <a:r>
               <a:rPr sz="1200" b="0" i="0">
                 <a:solidFill>
-                  <a:srgbClr val="143D21"/>
+                  <a:srgbClr val="1D7236"/>
                 </a:solidFill>
               </a:rPr>
               <a:t>사진 3</a:t>
@@ -5618,11 +5618,11 @@
             </a:avLst>
           </a:prstGeom>
           <a:solidFill>
-            <a:srgbClr val="D0F1DA"/>
+            <a:srgbClr val="D4F7DE"/>
           </a:solidFill>
           <a:ln w="19050">
             <a:solidFill>
-              <a:srgbClr val="2B8245"/>
+              <a:srgbClr val="43D66F"/>
             </a:solidFill>
             <a:prstDash val="dash"/>
           </a:ln>
@@ -5641,7 +5641,7 @@
             <a:r>
               <a:rPr sz="1200" b="0" i="0">
                 <a:solidFill>
-                  <a:srgbClr val="143D21"/>
+                  <a:srgbClr val="1D7236"/>
                 </a:solidFill>
               </a:rPr>
               <a:t>사진 4</a:t>
@@ -5666,11 +5666,11 @@
             </a:avLst>
           </a:prstGeom>
           <a:solidFill>
-            <a:srgbClr val="D0F1DA"/>
+            <a:srgbClr val="D4F7DE"/>
           </a:solidFill>
           <a:ln w="19050">
             <a:solidFill>
-              <a:srgbClr val="2B8245"/>
+              <a:srgbClr val="43D66F"/>
             </a:solidFill>
             <a:prstDash val="dash"/>
           </a:ln>
@@ -5689,7 +5689,7 @@
             <a:r>
               <a:rPr sz="1200" b="0" i="0">
                 <a:solidFill>
-                  <a:srgbClr val="143D21"/>
+                  <a:srgbClr val="1D7236"/>
                 </a:solidFill>
               </a:rPr>
               <a:t>사진 5</a:t>
@@ -5714,11 +5714,11 @@
             </a:avLst>
           </a:prstGeom>
           <a:solidFill>
-            <a:srgbClr val="D0F1DA"/>
+            <a:srgbClr val="D4F7DE"/>
           </a:solidFill>
           <a:ln w="19050">
             <a:solidFill>
-              <a:srgbClr val="2B8245"/>
+              <a:srgbClr val="43D66F"/>
             </a:solidFill>
             <a:prstDash val="dash"/>
           </a:ln>
@@ -5737,7 +5737,7 @@
             <a:r>
               <a:rPr sz="1200" b="0" i="0">
                 <a:solidFill>
-                  <a:srgbClr val="143D21"/>
+                  <a:srgbClr val="1D7236"/>
                 </a:solidFill>
               </a:rPr>
               <a:t>사진 6</a:t>
@@ -5817,7 +5817,7 @@
             <a:r>
               <a:rPr sz="3400" b="1" i="0">
                 <a:solidFill>
-                  <a:srgbClr val="143D21"/>
+                  <a:srgbClr val="1D7236"/>
                 </a:solidFill>
               </a:rPr>
               <a:t>와 주셔서 고맙습니다</a:t>
@@ -5855,7 +5855,7 @@
             <a:r>
               <a:rPr sz="1700" b="0" i="1">
                 <a:solidFill>
-                  <a:srgbClr val="143D21"/>
+                  <a:srgbClr val="1D7236"/>
                 </a:solidFill>
               </a:rPr>
               <a:t>잘 살겠습니다</a:t>
@@ -5920,34 +5920,34 @@
         <a:sysClr val="window" lastClr="FFFFFF"/>
       </a:lt1>
       <a:dk2>
-        <a:srgbClr val="143D21"/>
+        <a:srgbClr val="1D7236"/>
       </a:dk2>
       <a:lt2>
-        <a:srgbClr val="F0FAF3"/>
+        <a:srgbClr val="F3FCF6"/>
       </a:lt2>
       <a:accent1>
-        <a:srgbClr val="2B8245"/>
+        <a:srgbClr val="43D66F"/>
       </a:accent1>
       <a:accent2>
-        <a:srgbClr val="803B91"/>
+        <a:srgbClr val="339941"/>
       </a:accent2>
       <a:accent3>
-        <a:srgbClr val="143D21"/>
+        <a:srgbClr val="1D7236"/>
       </a:accent3>
       <a:accent4>
-        <a:srgbClr val="D0F1DA"/>
+        <a:srgbClr val="D4F7DE"/>
       </a:accent4>
       <a:accent5>
-        <a:srgbClr val="565E6B"/>
+        <a:srgbClr val="3BB858"/>
       </a:accent5>
       <a:accent6>
-        <a:srgbClr val="728B7A"/>
+        <a:srgbClr val="77AA86"/>
       </a:accent6>
       <a:hlink>
-        <a:srgbClr val="2B8245"/>
+        <a:srgbClr val="43D66F"/>
       </a:hlink>
       <a:folHlink>
-        <a:srgbClr val="143D21"/>
+        <a:srgbClr val="1D7236"/>
       </a:folHlink>
     </a:clrScheme>
     <a:fontScheme name="Office">
